--- a/reports/2025-annual.pptx
+++ b/reports/2025-annual.pptx
@@ -9287,7 +9287,7 @@
               </a:lnSpc>
             </a:pPr>
             <a:r>
-              <a:rPr sz="1300">
+              <a:rPr sz="1050">
                 <a:solidFill>
                   <a:srgbClr val="F5F3EC"/>
                 </a:solidFill>
@@ -9409,7 +9409,7 @@
               </a:lnSpc>
             </a:pPr>
             <a:r>
-              <a:rPr sz="1300">
+              <a:rPr sz="1050">
                 <a:solidFill>
                   <a:srgbClr val="F5F3EC"/>
                 </a:solidFill>
@@ -9531,7 +9531,7 @@
               </a:lnSpc>
             </a:pPr>
             <a:r>
-              <a:rPr sz="1300">
+              <a:rPr sz="1050">
                 <a:solidFill>
                   <a:srgbClr val="F5F3EC"/>
                 </a:solidFill>
@@ -9653,7 +9653,7 @@
               </a:lnSpc>
             </a:pPr>
             <a:r>
-              <a:rPr sz="1300">
+              <a:rPr sz="1050">
                 <a:solidFill>
                   <a:srgbClr val="F5F3EC"/>
                 </a:solidFill>
@@ -9775,7 +9775,7 @@
               </a:lnSpc>
             </a:pPr>
             <a:r>
-              <a:rPr sz="1300">
+              <a:rPr sz="1050">
                 <a:solidFill>
                   <a:srgbClr val="F5F3EC"/>
                 </a:solidFill>
@@ -10806,7 +10806,7 @@
               </a:lnSpc>
             </a:pPr>
             <a:r>
-              <a:rPr sz="1300">
+              <a:rPr sz="1200">
                 <a:solidFill>
                   <a:srgbClr val="F5F3EC"/>
                 </a:solidFill>
@@ -10928,7 +10928,7 @@
               </a:lnSpc>
             </a:pPr>
             <a:r>
-              <a:rPr sz="1300">
+              <a:rPr sz="1200">
                 <a:solidFill>
                   <a:srgbClr val="F5F3EC"/>
                 </a:solidFill>
@@ -11050,7 +11050,7 @@
               </a:lnSpc>
             </a:pPr>
             <a:r>
-              <a:rPr sz="1300">
+              <a:rPr sz="1200">
                 <a:solidFill>
                   <a:srgbClr val="F5F3EC"/>
                 </a:solidFill>
@@ -11172,7 +11172,7 @@
               </a:lnSpc>
             </a:pPr>
             <a:r>
-              <a:rPr sz="1300">
+              <a:rPr sz="1200">
                 <a:solidFill>
                   <a:srgbClr val="F5F3EC"/>
                 </a:solidFill>
@@ -11294,7 +11294,7 @@
               </a:lnSpc>
             </a:pPr>
             <a:r>
-              <a:rPr sz="1300">
+              <a:rPr sz="1200">
                 <a:solidFill>
                   <a:srgbClr val="F5F3EC"/>
                 </a:solidFill>
@@ -11416,7 +11416,7 @@
               </a:lnSpc>
             </a:pPr>
             <a:r>
-              <a:rPr sz="1300">
+              <a:rPr sz="1200">
                 <a:solidFill>
                   <a:srgbClr val="F5F3EC"/>
                 </a:solidFill>
